--- a/DataAnalysis_Track/decks/DA_S12_Charts_that_answer_the_question.pptx
+++ b/DataAnalysis_Track/decks/DA_S12_Charts_that_answer_the_question.pptx
@@ -481,7 +481,7 @@
 </file>
 
 <file path=ppt/notesSlides/notesSlide1.xml><?xml version="1.0" encoding="utf-8"?>
-<p:notes xmlns:a="http://schemas.openxmlformats.org/drawingml/2006/main" xmlns:p="http://schemas.openxmlformats.org/presentationml/2006/main" xmlns:r="http://schemas.openxmlformats.org/officeDocument/2006/relationships">
+<p:notes xmlns:a="http://schemas.openxmlformats.org/drawingml/2006/main" xmlns:p="http://schemas.openxmlformats.org/presentationml/2006/main">
   <p:cSld>
     <p:spTree>
       <p:nvGrpSpPr>
@@ -525,7 +525,87 @@
           <a:lstStyle/>
           <a:p>
             <a:r>
+              <a:t>TEACHING PURPOSE</a:t>
+            </a:r>
+          </a:p>
+          <a:p>
+            <a:r>
+              <a:t>Charts that answer the question</a:t>
+            </a:r>
+          </a:p>
+          <a:p>
+            <a:r>
+              <a:t/>
+            </a:r>
+          </a:p>
+          <a:p>
+            <a:r>
+              <a:t>LECTURER CUE</a:t>
+            </a:r>
+          </a:p>
+          <a:p>
+            <a:r>
               <a:t>Start on time.</a:t>
+            </a:r>
+          </a:p>
+          <a:p>
+            <a:r>
+              <a:t/>
+            </a:r>
+          </a:p>
+          <a:p>
+            <a:r>
+              <a:t>EXPLAIN IN ORDINARY WORDS</a:t>
+            </a:r>
+          </a:p>
+          <a:p>
+            <a:r>
+              <a:t>Begin with the question and intended comparison. Identify what an axis, bar, point or colour represents, including its unit. A chart summarises data and may hide variation.</a:t>
+            </a:r>
+          </a:p>
+          <a:p>
+            <a:r>
+              <a:t/>
+            </a:r>
+          </a:p>
+          <a:p>
+            <a:r>
+              <a:t>CHECK AND EXPECTED ANSWER</a:t>
+            </a:r>
+          </a:p>
+          <a:p>
+            <a:r>
+              <a:t>For a bar chart comparing amounts, why normally start the value axis at zero? Bar length encodes magnitude; truncation can exaggerate differences.</a:t>
+            </a:r>
+          </a:p>
+          <a:p>
+            <a:r>
+              <a:t/>
+            </a:r>
+          </a:p>
+          <a:p>
+            <a:r>
+              <a:t>IF LEARNERS ARE STUCK</a:t>
+            </a:r>
+          </a:p>
+          <a:p>
+            <a:r>
+              <a:t>Read one mark aloud as a sentence. Check the population, period, filters and units before stating the finding.</a:t>
+            </a:r>
+          </a:p>
+          <a:p>
+            <a:r>
+              <a:t/>
+            </a:r>
+          </a:p>
+          <a:p>
+            <a:r>
+              <a:t>NEXT</a:t>
+            </a:r>
+          </a:p>
+          <a:p>
+            <a:r>
+              <a:t>Where tonight sits. Move on after a learner can explain the current example or required action.</a:t>
             </a:r>
           </a:p>
         </p:txBody>
@@ -551,7 +631,7 @@
 </file>
 
 <file path=ppt/notesSlides/notesSlide10.xml><?xml version="1.0" encoding="utf-8"?>
-<p:notes xmlns:a="http://schemas.openxmlformats.org/drawingml/2006/main" xmlns:p="http://schemas.openxmlformats.org/presentationml/2006/main" xmlns:r="http://schemas.openxmlformats.org/officeDocument/2006/relationships">
+<p:notes xmlns:a="http://schemas.openxmlformats.org/drawingml/2006/main" xmlns:p="http://schemas.openxmlformats.org/presentationml/2006/main">
   <p:cSld>
     <p:spTree>
       <p:nvGrpSpPr>
@@ -595,7 +675,117 @@
           <a:lstStyle/>
           <a:p>
             <a:r>
+              <a:t>TEACHING PURPOSE</a:t>
+            </a:r>
+          </a:p>
+          <a:p>
+            <a:r>
+              <a:t>Every part of a chart has a name</a:t>
+            </a:r>
+          </a:p>
+          <a:p>
+            <a:r>
+              <a:t/>
+            </a:r>
+          </a:p>
+          <a:p>
+            <a:r>
+              <a:t>CONNECT</a:t>
+            </a:r>
+          </a:p>
+          <a:p>
+            <a:r>
+              <a:t>Build on the preceding slide: What a chart hides.</a:t>
+            </a:r>
+          </a:p>
+          <a:p>
+            <a:r>
+              <a:t/>
+            </a:r>
+          </a:p>
+          <a:p>
+            <a:r>
+              <a:t>LECTURER CUE</a:t>
+            </a:r>
+          </a:p>
+          <a:p>
+            <a:r>
               <a:t>You cannot be told to label an axis if nobody has said which part is the axis. Learn these eight words and every piece of chart advice you ever read becomes actionable.</a:t>
+            </a:r>
+          </a:p>
+          <a:p>
+            <a:r>
+              <a:t/>
+            </a:r>
+          </a:p>
+          <a:p>
+            <a:r>
+              <a:t>EXPLAIN IN ORDINARY WORDS</a:t>
+            </a:r>
+          </a:p>
+          <a:p>
+            <a:r>
+              <a:t>Begin with the question and intended comparison. Identify what an axis, bar, point or colour represents, including its unit. A chart summarises data and may hide variation.</a:t>
+            </a:r>
+          </a:p>
+          <a:p>
+            <a:r>
+              <a:t/>
+            </a:r>
+          </a:p>
+          <a:p>
+            <a:r>
+              <a:t>CHECK AND EXPECTED ANSWER</a:t>
+            </a:r>
+          </a:p>
+          <a:p>
+            <a:r>
+              <a:t>For a bar chart comparing amounts, why normally start the value axis at zero? Bar length encodes magnitude; truncation can exaggerate differences.</a:t>
+            </a:r>
+          </a:p>
+          <a:p>
+            <a:r>
+              <a:t/>
+            </a:r>
+          </a:p>
+          <a:p>
+            <a:r>
+              <a:t>IF LEARNERS ARE STUCK</a:t>
+            </a:r>
+          </a:p>
+          <a:p>
+            <a:r>
+              <a:t>Read one mark aloud as a sentence. Check the population, period, filters and units before stating the finding.</a:t>
+            </a:r>
+          </a:p>
+          <a:p>
+            <a:r>
+              <a:t/>
+            </a:r>
+          </a:p>
+          <a:p>
+            <a:r>
+              <a:t>READ THE VISUAL</a:t>
+            </a:r>
+          </a:p>
+          <a:p>
+            <a:r>
+              <a:t>Start with the title and labels. Read one row or mark aloud, including its unit. Let a learner read a second one before discussing the pattern. Do not infer a numerical value from an unlabelled drawing.</a:t>
+            </a:r>
+          </a:p>
+          <a:p>
+            <a:r>
+              <a:t/>
+            </a:r>
+          </a:p>
+          <a:p>
+            <a:r>
+              <a:t>NEXT</a:t>
+            </a:r>
+          </a:p>
+          <a:p>
+            <a:r>
+              <a:t>Four charts, and the question each one answers. Move on after a learner can explain the current example or required action.</a:t>
             </a:r>
           </a:p>
         </p:txBody>
@@ -620,8 +810,8 @@
 </p:notes>
 </file>
 
-<file path=ppt/notesSlides/notesSlide11.xml><?xml version="1.0" encoding="utf-8"?>
-<p:notes xmlns:a="http://schemas.openxmlformats.org/drawingml/2006/main" xmlns:p="http://schemas.openxmlformats.org/presentationml/2006/main" xmlns:r="http://schemas.openxmlformats.org/officeDocument/2006/relationships">
+<file path=ppt/notesSlides/notesSlide10006.xml><?xml version="1.0" encoding="utf-8"?>
+<p:notes xmlns:a="http://schemas.openxmlformats.org/drawingml/2006/main" xmlns:p="http://schemas.openxmlformats.org/presentationml/2006/main">
   <p:cSld>
     <p:spTree>
       <p:nvGrpSpPr>
@@ -665,7 +855,87 @@
           <a:lstStyle/>
           <a:p>
             <a:r>
-              <a:t>Drawn from the real course data. Pick the chart from the QUESTION, not from the menu: change over time, comparison across categories, the shape of one column, or whether two things move together.</a:t>
+              <a:t>TEACHING PURPOSE</a:t>
+            </a:r>
+          </a:p>
+          <a:p>
+            <a:r>
+              <a:t>The parts of a chart, and the four that matter</a:t>
+            </a:r>
+          </a:p>
+          <a:p>
+            <a:r>
+              <a:t/>
+            </a:r>
+          </a:p>
+          <a:p>
+            <a:r>
+              <a:t>CONNECT</a:t>
+            </a:r>
+          </a:p>
+          <a:p>
+            <a:r>
+              <a:t>Build on the preceding slide: Can somebody read your chart.</a:t>
+            </a:r>
+          </a:p>
+          <a:p>
+            <a:r>
+              <a:t/>
+            </a:r>
+          </a:p>
+          <a:p>
+            <a:r>
+              <a:t>EXPLAIN IN ORDINARY WORDS</a:t>
+            </a:r>
+          </a:p>
+          <a:p>
+            <a:r>
+              <a:t>Begin with the question and intended comparison. Identify what an axis, bar, point or colour represents, including its unit. A chart summarises data and may hide variation.</a:t>
+            </a:r>
+          </a:p>
+          <a:p>
+            <a:r>
+              <a:t/>
+            </a:r>
+          </a:p>
+          <a:p>
+            <a:r>
+              <a:t>CHECK AND EXPECTED ANSWER</a:t>
+            </a:r>
+          </a:p>
+          <a:p>
+            <a:r>
+              <a:t>For a bar chart comparing amounts, why normally start the value axis at zero? Bar length encodes magnitude; truncation can exaggerate differences.</a:t>
+            </a:r>
+          </a:p>
+          <a:p>
+            <a:r>
+              <a:t/>
+            </a:r>
+          </a:p>
+          <a:p>
+            <a:r>
+              <a:t>IF LEARNERS ARE STUCK</a:t>
+            </a:r>
+          </a:p>
+          <a:p>
+            <a:r>
+              <a:t>Read one mark aloud as a sentence. Check the population, period, filters and units before stating the finding.</a:t>
+            </a:r>
+          </a:p>
+          <a:p>
+            <a:r>
+              <a:t/>
+            </a:r>
+          </a:p>
+          <a:p>
+            <a:r>
+              <a:t>NEXT</a:t>
+            </a:r>
+          </a:p>
+          <a:p>
+            <a:r>
+              <a:t>Axis. Move on after a learner can explain the current example or required action.</a:t>
             </a:r>
           </a:p>
         </p:txBody>
@@ -690,8 +960,8 @@
 </p:notes>
 </file>
 
-<file path=ppt/notesSlides/notesSlide12.xml><?xml version="1.0" encoding="utf-8"?>
-<p:notes xmlns:a="http://schemas.openxmlformats.org/drawingml/2006/main" xmlns:p="http://schemas.openxmlformats.org/presentationml/2006/main" xmlns:r="http://schemas.openxmlformats.org/officeDocument/2006/relationships">
+<file path=ppt/notesSlides/notesSlide10015.xml><?xml version="1.0" encoding="utf-8"?>
+<p:notes xmlns:a="http://schemas.openxmlformats.org/drawingml/2006/main" xmlns:p="http://schemas.openxmlformats.org/presentationml/2006/main">
   <p:cSld>
     <p:spTree>
       <p:nvGrpSpPr>
@@ -733,7 +1003,91 @@
         <p:txBody>
           <a:bodyPr/>
           <a:lstStyle/>
-          <a:p/>
+          <a:p>
+            <a:r>
+              <a:t>TEACHING PURPOSE</a:t>
+            </a:r>
+          </a:p>
+          <a:p>
+            <a:r>
+              <a:t>Honesty, and putting the finding in the title</a:t>
+            </a:r>
+          </a:p>
+          <a:p>
+            <a:r>
+              <a:t/>
+            </a:r>
+          </a:p>
+          <a:p>
+            <a:r>
+              <a:t>CONNECT</a:t>
+            </a:r>
+          </a:p>
+          <a:p>
+            <a:r>
+              <a:t>Build on the preceding slide: Break.</a:t>
+            </a:r>
+          </a:p>
+          <a:p>
+            <a:r>
+              <a:t/>
+            </a:r>
+          </a:p>
+          <a:p>
+            <a:r>
+              <a:t>EXPLAIN IN ORDINARY WORDS</a:t>
+            </a:r>
+          </a:p>
+          <a:p>
+            <a:r>
+              <a:t>An observation describes the data. A finding answers a defined question with evidence. A recommendation adds an action, its justification and limits.</a:t>
+            </a:r>
+          </a:p>
+          <a:p>
+            <a:r>
+              <a:t/>
+            </a:r>
+          </a:p>
+          <a:p>
+            <a:r>
+              <a:t>CHECK AND EXPECTED ANSWER</a:t>
+            </a:r>
+          </a:p>
+          <a:p>
+            <a:r>
+              <a:t>Does a difference between two groups prove one caused the other? No. Other differences or selection may explain it.</a:t>
+            </a:r>
+          </a:p>
+          <a:p>
+            <a:r>
+              <a:t/>
+            </a:r>
+          </a:p>
+          <a:p>
+            <a:r>
+              <a:t>IF LEARNERS ARE STUCK</a:t>
+            </a:r>
+          </a:p>
+          <a:p>
+            <a:r>
+              <a:t>Ask for the population, time period, number and comparison. Then ask what additional evidence could change the recommendation.</a:t>
+            </a:r>
+          </a:p>
+          <a:p>
+            <a:r>
+              <a:t/>
+            </a:r>
+          </a:p>
+          <a:p>
+            <a:r>
+              <a:t>NEXT</a:t>
+            </a:r>
+          </a:p>
+          <a:p>
+            <a:r>
+              <a:t>A bar chart, sorted by what it is about. Move on after a learner can explain the current example or required action.</a:t>
+            </a:r>
+          </a:p>
         </p:txBody>
       </p:sp>
       <p:sp>
@@ -756,8 +1110,8 @@
 </p:notes>
 </file>
 
-<file path=ppt/notesSlides/notesSlide13.xml><?xml version="1.0" encoding="utf-8"?>
-<p:notes xmlns:a="http://schemas.openxmlformats.org/drawingml/2006/main" xmlns:p="http://schemas.openxmlformats.org/presentationml/2006/main" xmlns:r="http://schemas.openxmlformats.org/officeDocument/2006/relationships">
+<file path=ppt/notesSlides/notesSlide11.xml><?xml version="1.0" encoding="utf-8"?>
+<p:notes xmlns:a="http://schemas.openxmlformats.org/drawingml/2006/main" xmlns:p="http://schemas.openxmlformats.org/presentationml/2006/main">
   <p:cSld>
     <p:spTree>
       <p:nvGrpSpPr>
@@ -801,7 +1155,117 @@
           <a:lstStyle/>
           <a:p>
             <a:r>
-              <a:t>Ten minutes.</a:t>
+              <a:t>TEACHING PURPOSE</a:t>
+            </a:r>
+          </a:p>
+          <a:p>
+            <a:r>
+              <a:t>Four charts, and the question each one answers</a:t>
+            </a:r>
+          </a:p>
+          <a:p>
+            <a:r>
+              <a:t/>
+            </a:r>
+          </a:p>
+          <a:p>
+            <a:r>
+              <a:t>CONNECT</a:t>
+            </a:r>
+          </a:p>
+          <a:p>
+            <a:r>
+              <a:t>Build on the preceding slide: Every part of a chart has a name.</a:t>
+            </a:r>
+          </a:p>
+          <a:p>
+            <a:r>
+              <a:t/>
+            </a:r>
+          </a:p>
+          <a:p>
+            <a:r>
+              <a:t>LECTURER CUE</a:t>
+            </a:r>
+          </a:p>
+          <a:p>
+            <a:r>
+              <a:t>Drawn from the real course data. Pick the chart from the QUESTION, not from the menu: change over time, comparison across categories, the shape of one column, or whether two things move together.</a:t>
+            </a:r>
+          </a:p>
+          <a:p>
+            <a:r>
+              <a:t/>
+            </a:r>
+          </a:p>
+          <a:p>
+            <a:r>
+              <a:t>EXPLAIN IN ORDINARY WORDS</a:t>
+            </a:r>
+          </a:p>
+          <a:p>
+            <a:r>
+              <a:t>Begin with the question and intended comparison. Identify what an axis, bar, point or colour represents, including its unit. A chart summarises data and may hide variation.</a:t>
+            </a:r>
+          </a:p>
+          <a:p>
+            <a:r>
+              <a:t/>
+            </a:r>
+          </a:p>
+          <a:p>
+            <a:r>
+              <a:t>CHECK AND EXPECTED ANSWER</a:t>
+            </a:r>
+          </a:p>
+          <a:p>
+            <a:r>
+              <a:t>For a bar chart comparing amounts, why normally start the value axis at zero? Bar length encodes magnitude; truncation can exaggerate differences.</a:t>
+            </a:r>
+          </a:p>
+          <a:p>
+            <a:r>
+              <a:t/>
+            </a:r>
+          </a:p>
+          <a:p>
+            <a:r>
+              <a:t>IF LEARNERS ARE STUCK</a:t>
+            </a:r>
+          </a:p>
+          <a:p>
+            <a:r>
+              <a:t>Read one mark aloud as a sentence. Check the population, period, filters and units before stating the finding.</a:t>
+            </a:r>
+          </a:p>
+          <a:p>
+            <a:r>
+              <a:t/>
+            </a:r>
+          </a:p>
+          <a:p>
+            <a:r>
+              <a:t>READ THE VISUAL</a:t>
+            </a:r>
+          </a:p>
+          <a:p>
+            <a:r>
+              <a:t>Start with the title and labels. Read one row or mark aloud, including its unit. Let a learner read a second one before discussing the pattern. Do not infer a numerical value from an unlabelled drawing.</a:t>
+            </a:r>
+          </a:p>
+          <a:p>
+            <a:r>
+              <a:t/>
+            </a:r>
+          </a:p>
+          <a:p>
+            <a:r>
+              <a:t>NEXT</a:t>
+            </a:r>
+          </a:p>
+          <a:p>
+            <a:r>
+              <a:t>A line chart nobody has to ask about. Move on after a learner can explain the current example or required action.</a:t>
             </a:r>
           </a:p>
         </p:txBody>
@@ -826,8 +1290,8 @@
 </p:notes>
 </file>
 
-<file path=ppt/notesSlides/notesSlide14.xml><?xml version="1.0" encoding="utf-8"?>
-<p:notes xmlns:a="http://schemas.openxmlformats.org/drawingml/2006/main" xmlns:p="http://schemas.openxmlformats.org/presentationml/2006/main" xmlns:r="http://schemas.openxmlformats.org/officeDocument/2006/relationships">
+<file path=ppt/notesSlides/notesSlide12.xml><?xml version="1.0" encoding="utf-8"?>
+<p:notes xmlns:a="http://schemas.openxmlformats.org/drawingml/2006/main" xmlns:p="http://schemas.openxmlformats.org/presentationml/2006/main">
   <p:cSld>
     <p:spTree>
       <p:nvGrpSpPr>
@@ -869,7 +1333,91 @@
         <p:txBody>
           <a:bodyPr/>
           <a:lstStyle/>
-          <a:p/>
+          <a:p>
+            <a:r>
+              <a:t>TEACHING PURPOSE</a:t>
+            </a:r>
+          </a:p>
+          <a:p>
+            <a:r>
+              <a:t>A line chart nobody has to ask about</a:t>
+            </a:r>
+          </a:p>
+          <a:p>
+            <a:r>
+              <a:t/>
+            </a:r>
+          </a:p>
+          <a:p>
+            <a:r>
+              <a:t>CONNECT</a:t>
+            </a:r>
+          </a:p>
+          <a:p>
+            <a:r>
+              <a:t>Build on the preceding slide: Four charts, and the question each one answers.</a:t>
+            </a:r>
+          </a:p>
+          <a:p>
+            <a:r>
+              <a:t/>
+            </a:r>
+          </a:p>
+          <a:p>
+            <a:r>
+              <a:t>EXPLAIN IN ORDINARY WORDS</a:t>
+            </a:r>
+          </a:p>
+          <a:p>
+            <a:r>
+              <a:t>Begin with the question and intended comparison. Identify what an axis, bar, point or colour represents, including its unit. A chart summarises data and may hide variation.</a:t>
+            </a:r>
+          </a:p>
+          <a:p>
+            <a:r>
+              <a:t/>
+            </a:r>
+          </a:p>
+          <a:p>
+            <a:r>
+              <a:t>CHECK AND EXPECTED ANSWER</a:t>
+            </a:r>
+          </a:p>
+          <a:p>
+            <a:r>
+              <a:t>For a bar chart comparing amounts, why normally start the value axis at zero? Bar length encodes magnitude; truncation can exaggerate differences.</a:t>
+            </a:r>
+          </a:p>
+          <a:p>
+            <a:r>
+              <a:t/>
+            </a:r>
+          </a:p>
+          <a:p>
+            <a:r>
+              <a:t>IF LEARNERS ARE STUCK</a:t>
+            </a:r>
+          </a:p>
+          <a:p>
+            <a:r>
+              <a:t>Read one mark aloud as a sentence. Check the population, period, filters and units before stating the finding.</a:t>
+            </a:r>
+          </a:p>
+          <a:p>
+            <a:r>
+              <a:t/>
+            </a:r>
+          </a:p>
+          <a:p>
+            <a:r>
+              <a:t>NEXT</a:t>
+            </a:r>
+          </a:p>
+          <a:p>
+            <a:r>
+              <a:t>Break. Move on after a learner can explain the current example or required action.</a:t>
+            </a:r>
+          </a:p>
         </p:txBody>
       </p:sp>
       <p:sp>
@@ -892,8 +1440,8 @@
 </p:notes>
 </file>
 
-<file path=ppt/notesSlides/notesSlide15.xml><?xml version="1.0" encoding="utf-8"?>
-<p:notes xmlns:a="http://schemas.openxmlformats.org/drawingml/2006/main" xmlns:p="http://schemas.openxmlformats.org/presentationml/2006/main" xmlns:r="http://schemas.openxmlformats.org/officeDocument/2006/relationships">
+<file path=ppt/notesSlides/notesSlide13.xml><?xml version="1.0" encoding="utf-8"?>
+<p:notes xmlns:a="http://schemas.openxmlformats.org/drawingml/2006/main" xmlns:p="http://schemas.openxmlformats.org/presentationml/2006/main">
   <p:cSld>
     <p:spTree>
       <p:nvGrpSpPr>
@@ -937,7 +1485,57 @@
           <a:lstStyle/>
           <a:p>
             <a:r>
-              <a:t>Identical numbers. The left chart does not start at zero, which turns an ordinary month into a collapse. Neither chart contains a false number.</a:t>
+              <a:t>TEACHING PURPOSE</a:t>
+            </a:r>
+          </a:p>
+          <a:p>
+            <a:r>
+              <a:t>Break</a:t>
+            </a:r>
+          </a:p>
+          <a:p>
+            <a:r>
+              <a:t/>
+            </a:r>
+          </a:p>
+          <a:p>
+            <a:r>
+              <a:t>CONNECT</a:t>
+            </a:r>
+          </a:p>
+          <a:p>
+            <a:r>
+              <a:t>Build on the preceding slide: A line chart nobody has to ask about.</a:t>
+            </a:r>
+          </a:p>
+          <a:p>
+            <a:r>
+              <a:t/>
+            </a:r>
+          </a:p>
+          <a:p>
+            <a:r>
+              <a:t>LECTURER CUE</a:t>
+            </a:r>
+          </a:p>
+          <a:p>
+            <a:r>
+              <a:t>Ten minutes.</a:t>
+            </a:r>
+          </a:p>
+          <a:p>
+            <a:r>
+              <a:t/>
+            </a:r>
+          </a:p>
+          <a:p>
+            <a:r>
+              <a:t>NEXT</a:t>
+            </a:r>
+          </a:p>
+          <a:p>
+            <a:r>
+              <a:t>Honesty, and putting the finding in the title. Move on after a learner can explain the current example or required action.</a:t>
             </a:r>
           </a:p>
         </p:txBody>
@@ -962,8 +1560,8 @@
 </p:notes>
 </file>
 
-<file path=ppt/notesSlides/notesSlide16.xml><?xml version="1.0" encoding="utf-8"?>
-<p:notes xmlns:a="http://schemas.openxmlformats.org/drawingml/2006/main" xmlns:p="http://schemas.openxmlformats.org/presentationml/2006/main" xmlns:r="http://schemas.openxmlformats.org/officeDocument/2006/relationships">
+<file path=ppt/notesSlides/notesSlide14.xml><?xml version="1.0" encoding="utf-8"?>
+<p:notes xmlns:a="http://schemas.openxmlformats.org/drawingml/2006/main" xmlns:p="http://schemas.openxmlformats.org/presentationml/2006/main">
   <p:cSld>
     <p:spTree>
       <p:nvGrpSpPr>
@@ -1007,7 +1605,87 @@
           <a:lstStyle/>
           <a:p>
             <a:r>
-              <a:t>Titling a chart 'Revenue by month'. That is the axes read aloud, and it leaves the reader to do the work you were paid to do.</a:t>
+              <a:t>TEACHING PURPOSE</a:t>
+            </a:r>
+          </a:p>
+          <a:p>
+            <a:r>
+              <a:t>A bar chart, sorted by what it is about</a:t>
+            </a:r>
+          </a:p>
+          <a:p>
+            <a:r>
+              <a:t/>
+            </a:r>
+          </a:p>
+          <a:p>
+            <a:r>
+              <a:t>CONNECT</a:t>
+            </a:r>
+          </a:p>
+          <a:p>
+            <a:r>
+              <a:t>Build on the preceding slide: Honesty, and putting the finding in the title.</a:t>
+            </a:r>
+          </a:p>
+          <a:p>
+            <a:r>
+              <a:t/>
+            </a:r>
+          </a:p>
+          <a:p>
+            <a:r>
+              <a:t>EXPLAIN IN ORDINARY WORDS</a:t>
+            </a:r>
+          </a:p>
+          <a:p>
+            <a:r>
+              <a:t>Begin with the question and intended comparison. Identify what an axis, bar, point or colour represents, including its unit. A chart summarises data and may hide variation.</a:t>
+            </a:r>
+          </a:p>
+          <a:p>
+            <a:r>
+              <a:t/>
+            </a:r>
+          </a:p>
+          <a:p>
+            <a:r>
+              <a:t>CHECK AND EXPECTED ANSWER</a:t>
+            </a:r>
+          </a:p>
+          <a:p>
+            <a:r>
+              <a:t>For a bar chart comparing amounts, why normally start the value axis at zero? Bar length encodes magnitude; truncation can exaggerate differences.</a:t>
+            </a:r>
+          </a:p>
+          <a:p>
+            <a:r>
+              <a:t/>
+            </a:r>
+          </a:p>
+          <a:p>
+            <a:r>
+              <a:t>IF LEARNERS ARE STUCK</a:t>
+            </a:r>
+          </a:p>
+          <a:p>
+            <a:r>
+              <a:t>Read one mark aloud as a sentence. Check the population, period, filters and units before stating the finding.</a:t>
+            </a:r>
+          </a:p>
+          <a:p>
+            <a:r>
+              <a:t/>
+            </a:r>
+          </a:p>
+          <a:p>
+            <a:r>
+              <a:t>NEXT</a:t>
+            </a:r>
+          </a:p>
+          <a:p>
+            <a:r>
+              <a:t>The same real data, twice, telling two different stories. Move on after a learner can explain the current example or required action.</a:t>
             </a:r>
           </a:p>
         </p:txBody>
@@ -1032,8 +1710,8 @@
 </p:notes>
 </file>
 
-<file path=ppt/notesSlides/notesSlide17.xml><?xml version="1.0" encoding="utf-8"?>
-<p:notes xmlns:a="http://schemas.openxmlformats.org/drawingml/2006/main" xmlns:p="http://schemas.openxmlformats.org/presentationml/2006/main" xmlns:r="http://schemas.openxmlformats.org/officeDocument/2006/relationships">
+<file path=ppt/notesSlides/notesSlide15.xml><?xml version="1.0" encoding="utf-8"?>
+<p:notes xmlns:a="http://schemas.openxmlformats.org/drawingml/2006/main" xmlns:p="http://schemas.openxmlformats.org/presentationml/2006/main">
   <p:cSld>
     <p:spTree>
       <p:nvGrpSpPr>
@@ -1075,7 +1753,121 @@
         <p:txBody>
           <a:bodyPr/>
           <a:lstStyle/>
-          <a:p/>
+          <a:p>
+            <a:r>
+              <a:t>TEACHING PURPOSE</a:t>
+            </a:r>
+          </a:p>
+          <a:p>
+            <a:r>
+              <a:t>The same real data, twice, telling two different stories</a:t>
+            </a:r>
+          </a:p>
+          <a:p>
+            <a:r>
+              <a:t/>
+            </a:r>
+          </a:p>
+          <a:p>
+            <a:r>
+              <a:t>CONNECT</a:t>
+            </a:r>
+          </a:p>
+          <a:p>
+            <a:r>
+              <a:t>Build on the preceding slide: A bar chart, sorted by what it is about.</a:t>
+            </a:r>
+          </a:p>
+          <a:p>
+            <a:r>
+              <a:t/>
+            </a:r>
+          </a:p>
+          <a:p>
+            <a:r>
+              <a:t>LECTURER CUE</a:t>
+            </a:r>
+          </a:p>
+          <a:p>
+            <a:r>
+              <a:t>Identical numbers. The left chart does not start at zero, which turns an ordinary month into a collapse. Neither chart contains a false number.</a:t>
+            </a:r>
+          </a:p>
+          <a:p>
+            <a:r>
+              <a:t/>
+            </a:r>
+          </a:p>
+          <a:p>
+            <a:r>
+              <a:t>EXPLAIN IN ORDINARY WORDS</a:t>
+            </a:r>
+          </a:p>
+          <a:p>
+            <a:r>
+              <a:t>Begin with the question and intended comparison. Identify what an axis, bar, point or colour represents, including its unit. A chart summarises data and may hide variation.</a:t>
+            </a:r>
+          </a:p>
+          <a:p>
+            <a:r>
+              <a:t/>
+            </a:r>
+          </a:p>
+          <a:p>
+            <a:r>
+              <a:t>CHECK AND EXPECTED ANSWER</a:t>
+            </a:r>
+          </a:p>
+          <a:p>
+            <a:r>
+              <a:t>For a bar chart comparing amounts, why normally start the value axis at zero? Bar length encodes magnitude; truncation can exaggerate differences.</a:t>
+            </a:r>
+          </a:p>
+          <a:p>
+            <a:r>
+              <a:t/>
+            </a:r>
+          </a:p>
+          <a:p>
+            <a:r>
+              <a:t>IF LEARNERS ARE STUCK</a:t>
+            </a:r>
+          </a:p>
+          <a:p>
+            <a:r>
+              <a:t>Read one mark aloud as a sentence. Check the population, period, filters and units before stating the finding.</a:t>
+            </a:r>
+          </a:p>
+          <a:p>
+            <a:r>
+              <a:t/>
+            </a:r>
+          </a:p>
+          <a:p>
+            <a:r>
+              <a:t>READ THE VISUAL</a:t>
+            </a:r>
+          </a:p>
+          <a:p>
+            <a:r>
+              <a:t>Start with the title and labels. Read one row or mark aloud, including its unit. Let a learner read a second one before discussing the pattern. Do not infer a numerical value from an unlabelled drawing.</a:t>
+            </a:r>
+          </a:p>
+          <a:p>
+            <a:r>
+              <a:t/>
+            </a:r>
+          </a:p>
+          <a:p>
+            <a:r>
+              <a:t>NEXT</a:t>
+            </a:r>
+          </a:p>
+          <a:p>
+            <a:r>
+              <a:t>Titling a chart 'Revenue by month'. That is the axes read aloud, and it leaves the reader to do the work you were paid to do.. Move on after a learner can explain the current example or required action.</a:t>
+            </a:r>
+          </a:p>
         </p:txBody>
       </p:sp>
       <p:sp>
@@ -1098,8 +1890,8 @@
 </p:notes>
 </file>
 
-<file path=ppt/notesSlides/notesSlide18.xml><?xml version="1.0" encoding="utf-8"?>
-<p:notes xmlns:a="http://schemas.openxmlformats.org/drawingml/2006/main" xmlns:p="http://schemas.openxmlformats.org/presentationml/2006/main" xmlns:r="http://schemas.openxmlformats.org/officeDocument/2006/relationships">
+<file path=ppt/notesSlides/notesSlide16.xml><?xml version="1.0" encoding="utf-8"?>
+<p:notes xmlns:a="http://schemas.openxmlformats.org/drawingml/2006/main" xmlns:p="http://schemas.openxmlformats.org/presentationml/2006/main">
   <p:cSld>
     <p:spTree>
       <p:nvGrpSpPr>
@@ -1141,7 +1933,106 @@
         <p:txBody>
           <a:bodyPr/>
           <a:lstStyle/>
-          <a:p/>
+          <a:p>
+            <a:r>
+              <a:t>TEACHING PURPOSE</a:t>
+            </a:r>
+          </a:p>
+          <a:p>
+            <a:r>
+              <a:t>Titling a chart 'Revenue by month'. That is the axes read aloud, and it leaves the reader to do the work you were paid to do.</a:t>
+            </a:r>
+          </a:p>
+          <a:p>
+            <a:r>
+              <a:t/>
+            </a:r>
+          </a:p>
+          <a:p>
+            <a:r>
+              <a:t>CONNECT</a:t>
+            </a:r>
+          </a:p>
+          <a:p>
+            <a:r>
+              <a:t>Build on the preceding slide: The same real data, twice, telling two different stories.</a:t>
+            </a:r>
+          </a:p>
+          <a:p>
+            <a:r>
+              <a:t/>
+            </a:r>
+          </a:p>
+          <a:p>
+            <a:r>
+              <a:t>LECTURER CUE</a:t>
+            </a:r>
+          </a:p>
+          <a:p>
+            <a:r>
+              <a:t>Titling a chart 'Revenue by month'. That is the axes read aloud, and it leaves the reader to do the work you were paid to do.</a:t>
+            </a:r>
+          </a:p>
+          <a:p>
+            <a:r>
+              <a:t/>
+            </a:r>
+          </a:p>
+          <a:p>
+            <a:r>
+              <a:t>EXPLAIN IN ORDINARY WORDS</a:t>
+            </a:r>
+          </a:p>
+          <a:p>
+            <a:r>
+              <a:t>Begin with the question and intended comparison. Identify what an axis, bar, point or colour represents, including its unit. A chart summarises data and may hide variation.</a:t>
+            </a:r>
+          </a:p>
+          <a:p>
+            <a:r>
+              <a:t/>
+            </a:r>
+          </a:p>
+          <a:p>
+            <a:r>
+              <a:t>CHECK AND EXPECTED ANSWER</a:t>
+            </a:r>
+          </a:p>
+          <a:p>
+            <a:r>
+              <a:t>For a bar chart comparing amounts, why normally start the value axis at zero? Bar length encodes magnitude; truncation can exaggerate differences.</a:t>
+            </a:r>
+          </a:p>
+          <a:p>
+            <a:r>
+              <a:t/>
+            </a:r>
+          </a:p>
+          <a:p>
+            <a:r>
+              <a:t>IF LEARNERS ARE STUCK</a:t>
+            </a:r>
+          </a:p>
+          <a:p>
+            <a:r>
+              <a:t>Read one mark aloud as a sentence. Check the population, period, filters and units before stating the finding.</a:t>
+            </a:r>
+          </a:p>
+          <a:p>
+            <a:r>
+              <a:t/>
+            </a:r>
+          </a:p>
+          <a:p>
+            <a:r>
+              <a:t>NEXT</a:t>
+            </a:r>
+          </a:p>
+          <a:p>
+            <a:r>
+              <a:t>Can you answer these?. Move on after a learner can explain the current example or required action.</a:t>
+            </a:r>
+          </a:p>
         </p:txBody>
       </p:sp>
       <p:sp>
@@ -1164,8 +2055,8 @@
 </p:notes>
 </file>
 
-<file path=ppt/notesSlides/notesSlide19.xml><?xml version="1.0" encoding="utf-8"?>
-<p:notes xmlns:a="http://schemas.openxmlformats.org/drawingml/2006/main" xmlns:p="http://schemas.openxmlformats.org/presentationml/2006/main" xmlns:r="http://schemas.openxmlformats.org/officeDocument/2006/relationships">
+<file path=ppt/notesSlides/notesSlide17.xml><?xml version="1.0" encoding="utf-8"?>
+<p:notes xmlns:a="http://schemas.openxmlformats.org/drawingml/2006/main" xmlns:p="http://schemas.openxmlformats.org/presentationml/2006/main">
   <p:cSld>
     <p:spTree>
       <p:nvGrpSpPr>
@@ -1209,7 +2100,157 @@
           <a:lstStyle/>
           <a:p>
             <a:r>
-              <a:t>Take three of the questions from week one and answer each with one chart. Each gets a title that states its finding, labelled axes with units, and one sentence underneath naming what it hides.</a:t>
+              <a:t>TEACHING PURPOSE</a:t>
+            </a:r>
+          </a:p>
+          <a:p>
+            <a:r>
+              <a:t>Can you answer these?</a:t>
+            </a:r>
+          </a:p>
+          <a:p>
+            <a:r>
+              <a:t/>
+            </a:r>
+          </a:p>
+          <a:p>
+            <a:r>
+              <a:t>CONNECT</a:t>
+            </a:r>
+          </a:p>
+          <a:p>
+            <a:r>
+              <a:t>Build on the preceding slide: Titling a chart 'Revenue by month'. That is the axes read aloud, and it leaves the reader to do the work you were paid to do..</a:t>
+            </a:r>
+          </a:p>
+          <a:p>
+            <a:r>
+              <a:t/>
+            </a:r>
+          </a:p>
+          <a:p>
+            <a:r>
+              <a:t>EXPLAIN IN ORDINARY WORDS</a:t>
+            </a:r>
+          </a:p>
+          <a:p>
+            <a:r>
+              <a:t>A repository is the project folder and recorded history. A commit records a chosen change; uploading or pushing shares it. A README tells someone else how to run the work.</a:t>
+            </a:r>
+          </a:p>
+          <a:p>
+            <a:r>
+              <a:t/>
+            </a:r>
+          </a:p>
+          <a:p>
+            <a:r>
+              <a:t>CHECK AND EXPECTED ANSWER</a:t>
+            </a:r>
+          </a:p>
+          <a:p>
+            <a:r>
+              <a:t>Does saving to GitHub hand in the assignment? No; submission requires the correct form and its confirmation.</a:t>
+            </a:r>
+          </a:p>
+          <a:p>
+            <a:r>
+              <a:t/>
+            </a:r>
+          </a:p>
+          <a:p>
+            <a:r>
+              <a:t>IF LEARNERS ARE STUCK</a:t>
+            </a:r>
+          </a:p>
+          <a:p>
+            <a:r>
+              <a:t>Ask a partner to follow only the README. It should identify the data, files, run order and expected result. Keep secrets out of the repository.</a:t>
+            </a:r>
+          </a:p>
+          <a:p>
+            <a:r>
+              <a:t/>
+            </a:r>
+          </a:p>
+          <a:p>
+            <a:r>
+              <a:t>DISCUSSION KEY FOR THIS SLIDE</a:t>
+            </a:r>
+          </a:p>
+          <a:p>
+            <a:r>
+              <a:t>ANSWERS</a:t>
+            </a:r>
+          </a:p>
+          <a:p>
+            <a:r>
+              <a:t>How did you do?</a:t>
+            </a:r>
+          </a:p>
+          <a:p>
+            <a:r>
+              <a:t>A</a:t>
+            </a:r>
+          </a:p>
+          <a:p>
+            <a:r>
+              <a:t>"Revenue by region" as a title</a:t>
+            </a:r>
+          </a:p>
+          <a:p>
+            <a:r>
+              <a:t>It is the axes read aloud. It states the method rather than the finding, so the reader has to do the analysis themselves. "Eastern is our largest region, at UGX 2.51bn" is the same chart doing its job.</a:t>
+            </a:r>
+          </a:p>
+          <a:p>
+            <a:r>
+              <a:t>B</a:t>
+            </a:r>
+          </a:p>
+          <a:p>
+            <a:r>
+              <a:t>When truncation is legitimate</a:t>
+            </a:r>
+          </a:p>
+          <a:p>
+            <a:r>
+              <a:t>When zero is not meaningful and the audience knows it: body temperature, an index, a share price over one day. For revenue, volumes or counts, start at zero.</a:t>
+            </a:r>
+          </a:p>
+          <a:p>
+            <a:r>
+              <a:t>C</a:t>
+            </a:r>
+          </a:p>
+          <a:p>
+            <a:r>
+              <a:t>What a monthly line hides</a:t>
+            </a:r>
+          </a:p>
+          <a:p>
+            <a:r>
+              <a:t>The distribution inside each month. One large order can make a month, and the line cannot show you that. The largest single order here is UGX 46,552,400, which is visible in a histogram and invisible in a monthly total.</a:t>
+            </a:r>
+          </a:p>
+          <a:p>
+            <a:r>
+              <a:t>Let learners attempt first; use this to explain the reasoning, not just reveal the answer.</a:t>
+            </a:r>
+          </a:p>
+          <a:p>
+            <a:r>
+              <a:t/>
+            </a:r>
+          </a:p>
+          <a:p>
+            <a:r>
+              <a:t>NEXT</a:t>
+            </a:r>
+          </a:p>
+          <a:p>
+            <a:r>
+              <a:t>How did you do?. Move on after a learner can explain the current example or required action.</a:t>
             </a:r>
           </a:p>
         </p:txBody>
@@ -1234,8 +2275,8 @@
 </p:notes>
 </file>
 
-<file path=ppt/notesSlides/notesSlide2.xml><?xml version="1.0" encoding="utf-8"?>
-<p:notes xmlns:a="http://schemas.openxmlformats.org/drawingml/2006/main" xmlns:p="http://schemas.openxmlformats.org/presentationml/2006/main" xmlns:r="http://schemas.openxmlformats.org/officeDocument/2006/relationships">
+<file path=ppt/notesSlides/notesSlide18.xml><?xml version="1.0" encoding="utf-8"?>
+<p:notes xmlns:a="http://schemas.openxmlformats.org/drawingml/2006/main" xmlns:p="http://schemas.openxmlformats.org/presentationml/2006/main">
   <p:cSld>
     <p:spTree>
       <p:nvGrpSpPr>
@@ -1279,7 +2320,87 @@
           <a:lstStyle/>
           <a:p>
             <a:r>
-              <a:t>Tonight is session 12 of twelve.</a:t>
+              <a:t>TEACHING PURPOSE</a:t>
+            </a:r>
+          </a:p>
+          <a:p>
+            <a:r>
+              <a:t>How did you do?</a:t>
+            </a:r>
+          </a:p>
+          <a:p>
+            <a:r>
+              <a:t/>
+            </a:r>
+          </a:p>
+          <a:p>
+            <a:r>
+              <a:t>CONNECT</a:t>
+            </a:r>
+          </a:p>
+          <a:p>
+            <a:r>
+              <a:t>Build on the preceding slide: Can you answer these?.</a:t>
+            </a:r>
+          </a:p>
+          <a:p>
+            <a:r>
+              <a:t/>
+            </a:r>
+          </a:p>
+          <a:p>
+            <a:r>
+              <a:t>EXPLAIN IN ORDINARY WORDS</a:t>
+            </a:r>
+          </a:p>
+          <a:p>
+            <a:r>
+              <a:t>Mean is total divided by count. Median is the middle of sorted values. A percentile locates a position in that ordered distribution; interpolation conventions can differ. Match the summary to the question.</a:t>
+            </a:r>
+          </a:p>
+          <a:p>
+            <a:r>
+              <a:t/>
+            </a:r>
+          </a:p>
+          <a:p>
+            <a:r>
+              <a:t>CHECK AND EXPECTED ANSWER</a:t>
+            </a:r>
+          </a:p>
+          <a:p>
+            <a:r>
+              <a:t>For [2,3,4,5,100], median=4 and mean=22.8. The large value pulls the mean up.</a:t>
+            </a:r>
+          </a:p>
+          <a:p>
+            <a:r>
+              <a:t/>
+            </a:r>
+          </a:p>
+          <a:p>
+            <a:r>
+              <a:t>IF LEARNERS ARE STUCK</a:t>
+            </a:r>
+          </a:p>
+          <a:p>
+            <a:r>
+              <a:t>Sort five values by hand. A skewed distribution does not make the mean wrong if the question concerns totals or expected cost.</a:t>
+            </a:r>
+          </a:p>
+          <a:p>
+            <a:r>
+              <a:t/>
+            </a:r>
+          </a:p>
+          <a:p>
+            <a:r>
+              <a:t>NEXT</a:t>
+            </a:r>
+          </a:p>
+          <a:p>
+            <a:r>
+              <a:t>Three charts that answer three questions. Move on after a learner can explain the current example or required action.</a:t>
             </a:r>
           </a:p>
         </p:txBody>
@@ -1304,8 +2425,8 @@
 </p:notes>
 </file>
 
-<file path=ppt/notesSlides/notesSlide20.xml><?xml version="1.0" encoding="utf-8"?>
-<p:notes xmlns:a="http://schemas.openxmlformats.org/drawingml/2006/main" xmlns:p="http://schemas.openxmlformats.org/presentationml/2006/main" xmlns:r="http://schemas.openxmlformats.org/officeDocument/2006/relationships">
+<file path=ppt/notesSlides/notesSlide19.xml><?xml version="1.0" encoding="utf-8"?>
+<p:notes xmlns:a="http://schemas.openxmlformats.org/drawingml/2006/main" xmlns:p="http://schemas.openxmlformats.org/presentationml/2006/main">
   <p:cSld>
     <p:spTree>
       <p:nvGrpSpPr>
@@ -1347,7 +2468,106 @@
         <p:txBody>
           <a:bodyPr/>
           <a:lstStyle/>
-          <a:p/>
+          <a:p>
+            <a:r>
+              <a:t>TEACHING PURPOSE</a:t>
+            </a:r>
+          </a:p>
+          <a:p>
+            <a:r>
+              <a:t>Three charts that answer three questions</a:t>
+            </a:r>
+          </a:p>
+          <a:p>
+            <a:r>
+              <a:t/>
+            </a:r>
+          </a:p>
+          <a:p>
+            <a:r>
+              <a:t>CONNECT</a:t>
+            </a:r>
+          </a:p>
+          <a:p>
+            <a:r>
+              <a:t>Build on the preceding slide: How did you do?.</a:t>
+            </a:r>
+          </a:p>
+          <a:p>
+            <a:r>
+              <a:t/>
+            </a:r>
+          </a:p>
+          <a:p>
+            <a:r>
+              <a:t>LECTURER CUE</a:t>
+            </a:r>
+          </a:p>
+          <a:p>
+            <a:r>
+              <a:t>Take three of the questions from week one and answer each with one chart. Each gets a title that states its finding, labelled axes with units, and one sentence underneath naming what it hides.</a:t>
+            </a:r>
+          </a:p>
+          <a:p>
+            <a:r>
+              <a:t/>
+            </a:r>
+          </a:p>
+          <a:p>
+            <a:r>
+              <a:t>EXPLAIN IN ORDINARY WORDS</a:t>
+            </a:r>
+          </a:p>
+          <a:p>
+            <a:r>
+              <a:t>Begin with the question and intended comparison. Identify what an axis, bar, point or colour represents, including its unit. A chart summarises data and may hide variation.</a:t>
+            </a:r>
+          </a:p>
+          <a:p>
+            <a:r>
+              <a:t/>
+            </a:r>
+          </a:p>
+          <a:p>
+            <a:r>
+              <a:t>CHECK AND EXPECTED ANSWER</a:t>
+            </a:r>
+          </a:p>
+          <a:p>
+            <a:r>
+              <a:t>For a bar chart comparing amounts, why normally start the value axis at zero? Bar length encodes magnitude; truncation can exaggerate differences.</a:t>
+            </a:r>
+          </a:p>
+          <a:p>
+            <a:r>
+              <a:t/>
+            </a:r>
+          </a:p>
+          <a:p>
+            <a:r>
+              <a:t>IF LEARNERS ARE STUCK</a:t>
+            </a:r>
+          </a:p>
+          <a:p>
+            <a:r>
+              <a:t>Read one mark aloud as a sentence. Check the population, period, filters and units before stating the finding.</a:t>
+            </a:r>
+          </a:p>
+          <a:p>
+            <a:r>
+              <a:t/>
+            </a:r>
+          </a:p>
+          <a:p>
+            <a:r>
+              <a:t>NEXT</a:t>
+            </a:r>
+          </a:p>
+          <a:p>
+            <a:r>
+              <a:t>What you can do now. Move on after a learner can explain the current example or required action.</a:t>
+            </a:r>
+          </a:p>
         </p:txBody>
       </p:sp>
       <p:sp>
@@ -1370,8 +2590,8 @@
 </p:notes>
 </file>
 
-<file path=ppt/notesSlides/notesSlide21.xml><?xml version="1.0" encoding="utf-8"?>
-<p:notes xmlns:a="http://schemas.openxmlformats.org/drawingml/2006/main" xmlns:p="http://schemas.openxmlformats.org/presentationml/2006/main" xmlns:r="http://schemas.openxmlformats.org/officeDocument/2006/relationships">
+<file path=ppt/notesSlides/notesSlide2.xml><?xml version="1.0" encoding="utf-8"?>
+<p:notes xmlns:a="http://schemas.openxmlformats.org/drawingml/2006/main" xmlns:p="http://schemas.openxmlformats.org/presentationml/2006/main">
   <p:cSld>
     <p:spTree>
       <p:nvGrpSpPr>
@@ -1415,7 +2635,102 @@
           <a:lstStyle/>
           <a:p>
             <a:r>
-              <a:t>Take a chart from a report you receive and redraw it so the title states its finding. Bring both versions.</a:t>
+              <a:t>TEACHING PURPOSE</a:t>
+            </a:r>
+          </a:p>
+          <a:p>
+            <a:r>
+              <a:t>Where tonight sits</a:t>
+            </a:r>
+          </a:p>
+          <a:p>
+            <a:r>
+              <a:t/>
+            </a:r>
+          </a:p>
+          <a:p>
+            <a:r>
+              <a:t>CONNECT</a:t>
+            </a:r>
+          </a:p>
+          <a:p>
+            <a:r>
+              <a:t>Build on the preceding slide: Charts that answer the question.</a:t>
+            </a:r>
+          </a:p>
+          <a:p>
+            <a:r>
+              <a:t/>
+            </a:r>
+          </a:p>
+          <a:p>
+            <a:r>
+              <a:t>LECTURER CUE</a:t>
+            </a:r>
+          </a:p>
+          <a:p>
+            <a:r>
+              <a:t>Tonight is session 12 of fifteen.</a:t>
+            </a:r>
+          </a:p>
+          <a:p>
+            <a:r>
+              <a:t/>
+            </a:r>
+          </a:p>
+          <a:p>
+            <a:r>
+              <a:t>EXPLAIN IN ORDINARY WORDS</a:t>
+            </a:r>
+          </a:p>
+          <a:p>
+            <a:r>
+              <a:t>Grain means what one row represents. A key identifies a row; a primary key may use more than one column. A join matches keys, and multiple matches can multiply rows.</a:t>
+            </a:r>
+          </a:p>
+          <a:p>
+            <a:r>
+              <a:t/>
+            </a:r>
+          </a:p>
+          <a:p>
+            <a:r>
+              <a:t>CHECK AND EXPECTED ANSWER</a:t>
+            </a:r>
+          </a:p>
+          <a:p>
+            <a:r>
+              <a:t>One order has two lines. After joining orders to lines, how many rows for it? Two. Summing a repeated order-level total would double-count.</a:t>
+            </a:r>
+          </a:p>
+          <a:p>
+            <a:r>
+              <a:t/>
+            </a:r>
+          </a:p>
+          <a:p>
+            <a:r>
+              <a:t>IF LEARNERS ARE STUCK</a:t>
+            </a:r>
+          </a:p>
+          <a:p>
+            <a:r>
+              <a:t>Write one example row from each table. Circle keys and trace each match. Aggregate to the intended grain and check counts and totals.</a:t>
+            </a:r>
+          </a:p>
+          <a:p>
+            <a:r>
+              <a:t/>
+            </a:r>
+          </a:p>
+          <a:p>
+            <a:r>
+              <a:t>NEXT</a:t>
+            </a:r>
+          </a:p>
+          <a:p>
+            <a:r>
+              <a:t>The words for tonight. Move on after a learner can explain the current example or required action.</a:t>
             </a:r>
           </a:p>
         </p:txBody>
@@ -1440,8 +2755,8 @@
 </p:notes>
 </file>
 
-<file path=ppt/notesSlides/notesSlide22.xml><?xml version="1.0" encoding="utf-8"?>
-<p:notes xmlns:a="http://schemas.openxmlformats.org/drawingml/2006/main" xmlns:p="http://schemas.openxmlformats.org/presentationml/2006/main" xmlns:r="http://schemas.openxmlformats.org/officeDocument/2006/relationships">
+<file path=ppt/notesSlides/notesSlide20.xml><?xml version="1.0" encoding="utf-8"?>
+<p:notes xmlns:a="http://schemas.openxmlformats.org/drawingml/2006/main" xmlns:p="http://schemas.openxmlformats.org/presentationml/2006/main">
   <p:cSld>
     <p:spTree>
       <p:nvGrpSpPr>
@@ -1485,7 +2800,87 @@
           <a:lstStyle/>
           <a:p>
             <a:r>
-              <a:t>It is the cheapest improvement available to any chart you will ever make, and it forces you to decide what you actually found. A chart you cannot title has not finished being analysed.</a:t>
+              <a:t>TEACHING PURPOSE</a:t>
+            </a:r>
+          </a:p>
+          <a:p>
+            <a:r>
+              <a:t>What you can do now</a:t>
+            </a:r>
+          </a:p>
+          <a:p>
+            <a:r>
+              <a:t/>
+            </a:r>
+          </a:p>
+          <a:p>
+            <a:r>
+              <a:t>CONNECT</a:t>
+            </a:r>
+          </a:p>
+          <a:p>
+            <a:r>
+              <a:t>Build on the preceding slide: Three charts that answer three questions.</a:t>
+            </a:r>
+          </a:p>
+          <a:p>
+            <a:r>
+              <a:t/>
+            </a:r>
+          </a:p>
+          <a:p>
+            <a:r>
+              <a:t>EXPLAIN IN ORDINARY WORDS</a:t>
+            </a:r>
+          </a:p>
+          <a:p>
+            <a:r>
+              <a:t>Begin with the question and intended comparison. Identify what an axis, bar, point or colour represents, including its unit. A chart summarises data and may hide variation.</a:t>
+            </a:r>
+          </a:p>
+          <a:p>
+            <a:r>
+              <a:t/>
+            </a:r>
+          </a:p>
+          <a:p>
+            <a:r>
+              <a:t>CHECK AND EXPECTED ANSWER</a:t>
+            </a:r>
+          </a:p>
+          <a:p>
+            <a:r>
+              <a:t>For a bar chart comparing amounts, why normally start the value axis at zero? Bar length encodes magnitude; truncation can exaggerate differences.</a:t>
+            </a:r>
+          </a:p>
+          <a:p>
+            <a:r>
+              <a:t/>
+            </a:r>
+          </a:p>
+          <a:p>
+            <a:r>
+              <a:t>IF LEARNERS ARE STUCK</a:t>
+            </a:r>
+          </a:p>
+          <a:p>
+            <a:r>
+              <a:t>Read one mark aloud as a sentence. Check the population, period, filters and units before stating the finding.</a:t>
+            </a:r>
+          </a:p>
+          <a:p>
+            <a:r>
+              <a:t/>
+            </a:r>
+          </a:p>
+          <a:p>
+            <a:r>
+              <a:t>NEXT</a:t>
+            </a:r>
+          </a:p>
+          <a:p>
+            <a:r>
+              <a:t>Before the next session. Move on after a learner can explain the current example or required action.</a:t>
             </a:r>
           </a:p>
         </p:txBody>
@@ -1510,8 +2905,8 @@
 </p:notes>
 </file>
 
-<file path=ppt/notesSlides/notesSlide3.xml><?xml version="1.0" encoding="utf-8"?>
-<p:notes xmlns:a="http://schemas.openxmlformats.org/drawingml/2006/main" xmlns:p="http://schemas.openxmlformats.org/presentationml/2006/main" xmlns:r="http://schemas.openxmlformats.org/officeDocument/2006/relationships">
+<file path=ppt/notesSlides/notesSlide21.xml><?xml version="1.0" encoding="utf-8"?>
+<p:notes xmlns:a="http://schemas.openxmlformats.org/drawingml/2006/main" xmlns:p="http://schemas.openxmlformats.org/presentationml/2006/main">
   <p:cSld>
     <p:spTree>
       <p:nvGrpSpPr>
@@ -1553,7 +2948,106 @@
         <p:txBody>
           <a:bodyPr/>
           <a:lstStyle/>
-          <a:p/>
+          <a:p>
+            <a:r>
+              <a:t>TEACHING PURPOSE</a:t>
+            </a:r>
+          </a:p>
+          <a:p>
+            <a:r>
+              <a:t>Before the next session</a:t>
+            </a:r>
+          </a:p>
+          <a:p>
+            <a:r>
+              <a:t/>
+            </a:r>
+          </a:p>
+          <a:p>
+            <a:r>
+              <a:t>CONNECT</a:t>
+            </a:r>
+          </a:p>
+          <a:p>
+            <a:r>
+              <a:t>Build on the preceding slide: What you can do now.</a:t>
+            </a:r>
+          </a:p>
+          <a:p>
+            <a:r>
+              <a:t/>
+            </a:r>
+          </a:p>
+          <a:p>
+            <a:r>
+              <a:t>LECTURER CUE</a:t>
+            </a:r>
+          </a:p>
+          <a:p>
+            <a:r>
+              <a:t>Take a chart from a report you receive and redraw it so the title states its finding. Bring both versions.</a:t>
+            </a:r>
+          </a:p>
+          <a:p>
+            <a:r>
+              <a:t/>
+            </a:r>
+          </a:p>
+          <a:p>
+            <a:r>
+              <a:t>EXPLAIN IN ORDINARY WORDS</a:t>
+            </a:r>
+          </a:p>
+          <a:p>
+            <a:r>
+              <a:t>Begin with the question and intended comparison. Identify what an axis, bar, point or colour represents, including its unit. A chart summarises data and may hide variation.</a:t>
+            </a:r>
+          </a:p>
+          <a:p>
+            <a:r>
+              <a:t/>
+            </a:r>
+          </a:p>
+          <a:p>
+            <a:r>
+              <a:t>CHECK AND EXPECTED ANSWER</a:t>
+            </a:r>
+          </a:p>
+          <a:p>
+            <a:r>
+              <a:t>For a bar chart comparing amounts, why normally start the value axis at zero? Bar length encodes magnitude; truncation can exaggerate differences.</a:t>
+            </a:r>
+          </a:p>
+          <a:p>
+            <a:r>
+              <a:t/>
+            </a:r>
+          </a:p>
+          <a:p>
+            <a:r>
+              <a:t>IF LEARNERS ARE STUCK</a:t>
+            </a:r>
+          </a:p>
+          <a:p>
+            <a:r>
+              <a:t>Read one mark aloud as a sentence. Check the population, period, filters and units before stating the finding.</a:t>
+            </a:r>
+          </a:p>
+          <a:p>
+            <a:r>
+              <a:t/>
+            </a:r>
+          </a:p>
+          <a:p>
+            <a:r>
+              <a:t>NEXT</a:t>
+            </a:r>
+          </a:p>
+          <a:p>
+            <a:r>
+              <a:t>Put the finding in the title. Move on after a learner can explain the current example or required action.</a:t>
+            </a:r>
+          </a:p>
         </p:txBody>
       </p:sp>
       <p:sp>
@@ -1576,8 +3070,8 @@
 </p:notes>
 </file>
 
-<file path=ppt/notesSlides/notesSlide4.xml><?xml version="1.0" encoding="utf-8"?>
-<p:notes xmlns:a="http://schemas.openxmlformats.org/drawingml/2006/main" xmlns:p="http://schemas.openxmlformats.org/presentationml/2006/main" xmlns:r="http://schemas.openxmlformats.org/officeDocument/2006/relationships">
+<file path=ppt/notesSlides/notesSlide22.xml><?xml version="1.0" encoding="utf-8"?>
+<p:notes xmlns:a="http://schemas.openxmlformats.org/drawingml/2006/main" xmlns:p="http://schemas.openxmlformats.org/presentationml/2006/main">
   <p:cSld>
     <p:spTree>
       <p:nvGrpSpPr>
@@ -1621,7 +3115,87 @@
           <a:lstStyle/>
           <a:p>
             <a:r>
-              <a:t>These three are what tonight is marked against, in the sense that the lab checks them.</a:t>
+              <a:t>TEACHING PURPOSE</a:t>
+            </a:r>
+          </a:p>
+          <a:p>
+            <a:r>
+              <a:t>Put the finding in the title</a:t>
+            </a:r>
+          </a:p>
+          <a:p>
+            <a:r>
+              <a:t/>
+            </a:r>
+          </a:p>
+          <a:p>
+            <a:r>
+              <a:t>CONNECT</a:t>
+            </a:r>
+          </a:p>
+          <a:p>
+            <a:r>
+              <a:t>Build on the preceding slide: Before the next session.</a:t>
+            </a:r>
+          </a:p>
+          <a:p>
+            <a:r>
+              <a:t/>
+            </a:r>
+          </a:p>
+          <a:p>
+            <a:r>
+              <a:t>LECTURER CUE</a:t>
+            </a:r>
+          </a:p>
+          <a:p>
+            <a:r>
+              <a:t>It is the cheapest improvement available to any chart you will ever make, and it forces you to decide what you actually found. A chart you cannot title has not finished being analysed.</a:t>
+            </a:r>
+          </a:p>
+          <a:p>
+            <a:r>
+              <a:t/>
+            </a:r>
+          </a:p>
+          <a:p>
+            <a:r>
+              <a:t>EXPLAIN IN ORDINARY WORDS</a:t>
+            </a:r>
+          </a:p>
+          <a:p>
+            <a:r>
+              <a:t>An observation describes the data. A finding answers a defined question with evidence. A recommendation adds an action, its justification and limits.</a:t>
+            </a:r>
+          </a:p>
+          <a:p>
+            <a:r>
+              <a:t/>
+            </a:r>
+          </a:p>
+          <a:p>
+            <a:r>
+              <a:t>CHECK AND EXPECTED ANSWER</a:t>
+            </a:r>
+          </a:p>
+          <a:p>
+            <a:r>
+              <a:t>Does a difference between two groups prove one caused the other? No. Other differences or selection may explain it.</a:t>
+            </a:r>
+          </a:p>
+          <a:p>
+            <a:r>
+              <a:t/>
+            </a:r>
+          </a:p>
+          <a:p>
+            <a:r>
+              <a:t>IF LEARNERS ARE STUCK</a:t>
+            </a:r>
+          </a:p>
+          <a:p>
+            <a:r>
+              <a:t>Ask for the population, time period, number and comparison. Then ask what additional evidence could change the recommendation.</a:t>
             </a:r>
           </a:p>
         </p:txBody>
@@ -1646,8 +3220,8 @@
 </p:notes>
 </file>
 
-<file path=ppt/notesSlides/notesSlide5.xml><?xml version="1.0" encoding="utf-8"?>
-<p:notes xmlns:a="http://schemas.openxmlformats.org/drawingml/2006/main" xmlns:p="http://schemas.openxmlformats.org/presentationml/2006/main" xmlns:r="http://schemas.openxmlformats.org/officeDocument/2006/relationships">
+<file path=ppt/notesSlides/notesSlide3.xml><?xml version="1.0" encoding="utf-8"?>
+<p:notes xmlns:a="http://schemas.openxmlformats.org/drawingml/2006/main" xmlns:p="http://schemas.openxmlformats.org/presentationml/2006/main">
   <p:cSld>
     <p:spTree>
       <p:nvGrpSpPr>
@@ -1691,7 +3265,87 @@
           <a:lstStyle/>
           <a:p>
             <a:r>
-              <a:t>If it needs narrating, it is a chart for you rather than a chart for them.</a:t>
+              <a:t>TEACHING PURPOSE</a:t>
+            </a:r>
+          </a:p>
+          <a:p>
+            <a:r>
+              <a:t>The words for tonight</a:t>
+            </a:r>
+          </a:p>
+          <a:p>
+            <a:r>
+              <a:t/>
+            </a:r>
+          </a:p>
+          <a:p>
+            <a:r>
+              <a:t>CONNECT</a:t>
+            </a:r>
+          </a:p>
+          <a:p>
+            <a:r>
+              <a:t>Build on the preceding slide: Where tonight sits.</a:t>
+            </a:r>
+          </a:p>
+          <a:p>
+            <a:r>
+              <a:t/>
+            </a:r>
+          </a:p>
+          <a:p>
+            <a:r>
+              <a:t>EXPLAIN IN ORDINARY WORDS</a:t>
+            </a:r>
+          </a:p>
+          <a:p>
+            <a:r>
+              <a:t>Mean is total divided by count. Median is the middle of sorted values. A percentile locates a position in that ordered distribution; interpolation conventions can differ. Match the summary to the question.</a:t>
+            </a:r>
+          </a:p>
+          <a:p>
+            <a:r>
+              <a:t/>
+            </a:r>
+          </a:p>
+          <a:p>
+            <a:r>
+              <a:t>CHECK AND EXPECTED ANSWER</a:t>
+            </a:r>
+          </a:p>
+          <a:p>
+            <a:r>
+              <a:t>For [2,3,4,5,100], median=4 and mean=22.8. The large value pulls the mean up.</a:t>
+            </a:r>
+          </a:p>
+          <a:p>
+            <a:r>
+              <a:t/>
+            </a:r>
+          </a:p>
+          <a:p>
+            <a:r>
+              <a:t>IF LEARNERS ARE STUCK</a:t>
+            </a:r>
+          </a:p>
+          <a:p>
+            <a:r>
+              <a:t>Sort five values by hand. A skewed distribution does not make the mean wrong if the question concerns totals or expected cost.</a:t>
+            </a:r>
+          </a:p>
+          <a:p>
+            <a:r>
+              <a:t/>
+            </a:r>
+          </a:p>
+          <a:p>
+            <a:r>
+              <a:t>NEXT</a:t>
+            </a:r>
+          </a:p>
+          <a:p>
+            <a:r>
+              <a:t>By the end of tonight you can…. Move on after a learner can explain the current example or required action.</a:t>
             </a:r>
           </a:p>
         </p:txBody>
@@ -1716,8 +3370,8 @@
 </p:notes>
 </file>
 
-<file path=ppt/notesSlides/notesSlide6.xml><?xml version="1.0" encoding="utf-8"?>
-<p:notes xmlns:a="http://schemas.openxmlformats.org/drawingml/2006/main" xmlns:p="http://schemas.openxmlformats.org/presentationml/2006/main" xmlns:r="http://schemas.openxmlformats.org/officeDocument/2006/relationships">
+<file path=ppt/notesSlides/notesSlide4.xml><?xml version="1.0" encoding="utf-8"?>
+<p:notes xmlns:a="http://schemas.openxmlformats.org/drawingml/2006/main" xmlns:p="http://schemas.openxmlformats.org/presentationml/2006/main">
   <p:cSld>
     <p:spTree>
       <p:nvGrpSpPr>
@@ -1761,7 +3415,102 @@
           <a:lstStyle/>
           <a:p>
             <a:r>
-              <a:t>The scale down the side or along the bottom. Every axis needs a label and a unit, and a value axis usually needs to start at zero.</a:t>
+              <a:t>TEACHING PURPOSE</a:t>
+            </a:r>
+          </a:p>
+          <a:p>
+            <a:r>
+              <a:t>By the end of tonight you can…</a:t>
+            </a:r>
+          </a:p>
+          <a:p>
+            <a:r>
+              <a:t/>
+            </a:r>
+          </a:p>
+          <a:p>
+            <a:r>
+              <a:t>CONNECT</a:t>
+            </a:r>
+          </a:p>
+          <a:p>
+            <a:r>
+              <a:t>Build on the preceding slide: The words for tonight.</a:t>
+            </a:r>
+          </a:p>
+          <a:p>
+            <a:r>
+              <a:t/>
+            </a:r>
+          </a:p>
+          <a:p>
+            <a:r>
+              <a:t>LECTURER CUE</a:t>
+            </a:r>
+          </a:p>
+          <a:p>
+            <a:r>
+              <a:t>These three are what tonight is marked against, in the sense that the lab checks them.</a:t>
+            </a:r>
+          </a:p>
+          <a:p>
+            <a:r>
+              <a:t/>
+            </a:r>
+          </a:p>
+          <a:p>
+            <a:r>
+              <a:t>EXPLAIN IN ORDINARY WORDS</a:t>
+            </a:r>
+          </a:p>
+          <a:p>
+            <a:r>
+              <a:t>Begin with the question and intended comparison. Identify what an axis, bar, point or colour represents, including its unit. A chart summarises data and may hide variation.</a:t>
+            </a:r>
+          </a:p>
+          <a:p>
+            <a:r>
+              <a:t/>
+            </a:r>
+          </a:p>
+          <a:p>
+            <a:r>
+              <a:t>CHECK AND EXPECTED ANSWER</a:t>
+            </a:r>
+          </a:p>
+          <a:p>
+            <a:r>
+              <a:t>For a bar chart comparing amounts, why normally start the value axis at zero? Bar length encodes magnitude; truncation can exaggerate differences.</a:t>
+            </a:r>
+          </a:p>
+          <a:p>
+            <a:r>
+              <a:t/>
+            </a:r>
+          </a:p>
+          <a:p>
+            <a:r>
+              <a:t>IF LEARNERS ARE STUCK</a:t>
+            </a:r>
+          </a:p>
+          <a:p>
+            <a:r>
+              <a:t>Read one mark aloud as a sentence. Check the population, period, filters and units before stating the finding.</a:t>
+            </a:r>
+          </a:p>
+          <a:p>
+            <a:r>
+              <a:t/>
+            </a:r>
+          </a:p>
+          <a:p>
+            <a:r>
+              <a:t>NEXT</a:t>
+            </a:r>
+          </a:p>
+          <a:p>
+            <a:r>
+              <a:t>Can somebody read your chart. Move on after a learner can explain the current example or required action.</a:t>
             </a:r>
           </a:p>
         </p:txBody>
@@ -1786,8 +3535,8 @@
 </p:notes>
 </file>
 
-<file path=ppt/notesSlides/notesSlide7.xml><?xml version="1.0" encoding="utf-8"?>
-<p:notes xmlns:a="http://schemas.openxmlformats.org/drawingml/2006/main" xmlns:p="http://schemas.openxmlformats.org/presentationml/2006/main" xmlns:r="http://schemas.openxmlformats.org/officeDocument/2006/relationships">
+<file path=ppt/notesSlides/notesSlide5.xml><?xml version="1.0" encoding="utf-8"?>
+<p:notes xmlns:a="http://schemas.openxmlformats.org/drawingml/2006/main" xmlns:p="http://schemas.openxmlformats.org/presentationml/2006/main">
   <p:cSld>
     <p:spTree>
       <p:nvGrpSpPr>
@@ -1831,7 +3580,102 @@
           <a:lstStyle/>
           <a:p>
             <a:r>
-              <a:t>A chart of a distribution: values in bands along the bottom, counts up the side. It is not a bar chart, and the difference matters.</a:t>
+              <a:t>TEACHING PURPOSE</a:t>
+            </a:r>
+          </a:p>
+          <a:p>
+            <a:r>
+              <a:t>Can somebody read your chart</a:t>
+            </a:r>
+          </a:p>
+          <a:p>
+            <a:r>
+              <a:t/>
+            </a:r>
+          </a:p>
+          <a:p>
+            <a:r>
+              <a:t>CONNECT</a:t>
+            </a:r>
+          </a:p>
+          <a:p>
+            <a:r>
+              <a:t>Build on the preceding slide: By the end of tonight you can….</a:t>
+            </a:r>
+          </a:p>
+          <a:p>
+            <a:r>
+              <a:t/>
+            </a:r>
+          </a:p>
+          <a:p>
+            <a:r>
+              <a:t>LECTURER CUE</a:t>
+            </a:r>
+          </a:p>
+          <a:p>
+            <a:r>
+              <a:t>If it needs narrating, it is a chart for you rather than a chart for them.</a:t>
+            </a:r>
+          </a:p>
+          <a:p>
+            <a:r>
+              <a:t/>
+            </a:r>
+          </a:p>
+          <a:p>
+            <a:r>
+              <a:t>EXPLAIN IN ORDINARY WORDS</a:t>
+            </a:r>
+          </a:p>
+          <a:p>
+            <a:r>
+              <a:t>Begin with the question and intended comparison. Identify what an axis, bar, point or colour represents, including its unit. A chart summarises data and may hide variation.</a:t>
+            </a:r>
+          </a:p>
+          <a:p>
+            <a:r>
+              <a:t/>
+            </a:r>
+          </a:p>
+          <a:p>
+            <a:r>
+              <a:t>CHECK AND EXPECTED ANSWER</a:t>
+            </a:r>
+          </a:p>
+          <a:p>
+            <a:r>
+              <a:t>For a bar chart comparing amounts, why normally start the value axis at zero? Bar length encodes magnitude; truncation can exaggerate differences.</a:t>
+            </a:r>
+          </a:p>
+          <a:p>
+            <a:r>
+              <a:t/>
+            </a:r>
+          </a:p>
+          <a:p>
+            <a:r>
+              <a:t>IF LEARNERS ARE STUCK</a:t>
+            </a:r>
+          </a:p>
+          <a:p>
+            <a:r>
+              <a:t>Read one mark aloud as a sentence. Check the population, period, filters and units before stating the finding.</a:t>
+            </a:r>
+          </a:p>
+          <a:p>
+            <a:r>
+              <a:t/>
+            </a:r>
+          </a:p>
+          <a:p>
+            <a:r>
+              <a:t>NEXT</a:t>
+            </a:r>
+          </a:p>
+          <a:p>
+            <a:r>
+              <a:t>The parts of a chart, and the four that matter. Move on after a learner can explain the current example or required action.</a:t>
             </a:r>
           </a:p>
         </p:txBody>
@@ -1856,8 +3700,8 @@
 </p:notes>
 </file>
 
-<file path=ppt/notesSlides/notesSlide8.xml><?xml version="1.0" encoding="utf-8"?>
-<p:notes xmlns:a="http://schemas.openxmlformats.org/drawingml/2006/main" xmlns:p="http://schemas.openxmlformats.org/presentationml/2006/main" xmlns:r="http://schemas.openxmlformats.org/officeDocument/2006/relationships">
+<file path=ppt/notesSlides/notesSlide6.xml><?xml version="1.0" encoding="utf-8"?>
+<p:notes xmlns:a="http://schemas.openxmlformats.org/drawingml/2006/main" xmlns:p="http://schemas.openxmlformats.org/presentationml/2006/main">
   <p:cSld>
     <p:spTree>
       <p:nvGrpSpPr>
@@ -1901,7 +3745,102 @@
           <a:lstStyle/>
           <a:p>
             <a:r>
-              <a:t>One line stating the FINDING. Not the variables, not the method: the thing you want the reader to leave with, in words, above the picture.</a:t>
+              <a:t>TEACHING PURPOSE</a:t>
+            </a:r>
+          </a:p>
+          <a:p>
+            <a:r>
+              <a:t>Axis</a:t>
+            </a:r>
+          </a:p>
+          <a:p>
+            <a:r>
+              <a:t/>
+            </a:r>
+          </a:p>
+          <a:p>
+            <a:r>
+              <a:t>CONNECT</a:t>
+            </a:r>
+          </a:p>
+          <a:p>
+            <a:r>
+              <a:t>Build on the preceding slide: The parts of a chart, and the four that matter.</a:t>
+            </a:r>
+          </a:p>
+          <a:p>
+            <a:r>
+              <a:t/>
+            </a:r>
+          </a:p>
+          <a:p>
+            <a:r>
+              <a:t>LECTURER CUE</a:t>
+            </a:r>
+          </a:p>
+          <a:p>
+            <a:r>
+              <a:t>The scale down the side or along the bottom. Every axis needs a label and a unit, and a value axis usually needs to start at zero.</a:t>
+            </a:r>
+          </a:p>
+          <a:p>
+            <a:r>
+              <a:t/>
+            </a:r>
+          </a:p>
+          <a:p>
+            <a:r>
+              <a:t>EXPLAIN IN ORDINARY WORDS</a:t>
+            </a:r>
+          </a:p>
+          <a:p>
+            <a:r>
+              <a:t>Begin with the question and intended comparison. Identify what an axis, bar, point or colour represents, including its unit. A chart summarises data and may hide variation.</a:t>
+            </a:r>
+          </a:p>
+          <a:p>
+            <a:r>
+              <a:t/>
+            </a:r>
+          </a:p>
+          <a:p>
+            <a:r>
+              <a:t>CHECK AND EXPECTED ANSWER</a:t>
+            </a:r>
+          </a:p>
+          <a:p>
+            <a:r>
+              <a:t>For a bar chart comparing amounts, why normally start the value axis at zero? Bar length encodes magnitude; truncation can exaggerate differences.</a:t>
+            </a:r>
+          </a:p>
+          <a:p>
+            <a:r>
+              <a:t/>
+            </a:r>
+          </a:p>
+          <a:p>
+            <a:r>
+              <a:t>IF LEARNERS ARE STUCK</a:t>
+            </a:r>
+          </a:p>
+          <a:p>
+            <a:r>
+              <a:t>Read one mark aloud as a sentence. Check the population, period, filters and units before stating the finding.</a:t>
+            </a:r>
+          </a:p>
+          <a:p>
+            <a:r>
+              <a:t/>
+            </a:r>
+          </a:p>
+          <a:p>
+            <a:r>
+              <a:t>NEXT</a:t>
+            </a:r>
+          </a:p>
+          <a:p>
+            <a:r>
+              <a:t>Histogram. Move on after a learner can explain the current example or required action.</a:t>
             </a:r>
           </a:p>
         </p:txBody>
@@ -1926,8 +3865,8 @@
 </p:notes>
 </file>
 
-<file path=ppt/notesSlides/notesSlide9.xml><?xml version="1.0" encoding="utf-8"?>
-<p:notes xmlns:a="http://schemas.openxmlformats.org/drawingml/2006/main" xmlns:p="http://schemas.openxmlformats.org/presentationml/2006/main" xmlns:r="http://schemas.openxmlformats.org/officeDocument/2006/relationships">
+<file path=ppt/notesSlides/notesSlide7.xml><?xml version="1.0" encoding="utf-8"?>
+<p:notes xmlns:a="http://schemas.openxmlformats.org/drawingml/2006/main" xmlns:p="http://schemas.openxmlformats.org/presentationml/2006/main">
   <p:cSld>
     <p:spTree>
       <p:nvGrpSpPr>
@@ -1971,7 +3910,432 @@
           <a:lstStyle/>
           <a:p>
             <a:r>
+              <a:t>TEACHING PURPOSE</a:t>
+            </a:r>
+          </a:p>
+          <a:p>
+            <a:r>
+              <a:t>Histogram</a:t>
+            </a:r>
+          </a:p>
+          <a:p>
+            <a:r>
+              <a:t/>
+            </a:r>
+          </a:p>
+          <a:p>
+            <a:r>
+              <a:t>CONNECT</a:t>
+            </a:r>
+          </a:p>
+          <a:p>
+            <a:r>
+              <a:t>Build on the preceding slide: Axis.</a:t>
+            </a:r>
+          </a:p>
+          <a:p>
+            <a:r>
+              <a:t/>
+            </a:r>
+          </a:p>
+          <a:p>
+            <a:r>
+              <a:t>LECTURER CUE</a:t>
+            </a:r>
+          </a:p>
+          <a:p>
+            <a:r>
+              <a:t>A chart of a distribution: values in bands along the bottom, counts up the side. It is not a bar chart, and the difference matters.</a:t>
+            </a:r>
+          </a:p>
+          <a:p>
+            <a:r>
+              <a:t/>
+            </a:r>
+          </a:p>
+          <a:p>
+            <a:r>
+              <a:t>EXPLAIN IN ORDINARY WORDS</a:t>
+            </a:r>
+          </a:p>
+          <a:p>
+            <a:r>
+              <a:t>Begin with the question and intended comparison. Identify what an axis, bar, point or colour represents, including its unit. A chart summarises data and may hide variation.</a:t>
+            </a:r>
+          </a:p>
+          <a:p>
+            <a:r>
+              <a:t/>
+            </a:r>
+          </a:p>
+          <a:p>
+            <a:r>
+              <a:t>CHECK AND EXPECTED ANSWER</a:t>
+            </a:r>
+          </a:p>
+          <a:p>
+            <a:r>
+              <a:t>For a bar chart comparing amounts, why normally start the value axis at zero? Bar length encodes magnitude; truncation can exaggerate differences.</a:t>
+            </a:r>
+          </a:p>
+          <a:p>
+            <a:r>
+              <a:t/>
+            </a:r>
+          </a:p>
+          <a:p>
+            <a:r>
+              <a:t>IF LEARNERS ARE STUCK</a:t>
+            </a:r>
+          </a:p>
+          <a:p>
+            <a:r>
+              <a:t>Read one mark aloud as a sentence. Check the population, period, filters and units before stating the finding.</a:t>
+            </a:r>
+          </a:p>
+          <a:p>
+            <a:r>
+              <a:t/>
+            </a:r>
+          </a:p>
+          <a:p>
+            <a:r>
+              <a:t>NEXT</a:t>
+            </a:r>
+          </a:p>
+          <a:p>
+            <a:r>
+              <a:t>A chart title. Move on after a learner can explain the current example or required action.</a:t>
+            </a:r>
+          </a:p>
+        </p:txBody>
+      </p:sp>
+      <p:sp>
+        <p:nvSpPr>
+          <p:cNvPr id="4" name="Slide Number Placeholder 3"/>
+          <p:cNvSpPr>
+            <a:spLocks noGrp="1"/>
+          </p:cNvSpPr>
+          <p:nvPr>
+            <p:ph type="sldNum" idx="5" sz="quarter"/>
+          </p:nvPr>
+        </p:nvSpPr>
+        <p:spPr/>
+      </p:sp>
+    </p:spTree>
+  </p:cSld>
+  <p:clrMapOvr>
+    <a:masterClrMapping/>
+  </p:clrMapOvr>
+</p:notes>
+</file>
+
+<file path=ppt/notesSlides/notesSlide8.xml><?xml version="1.0" encoding="utf-8"?>
+<p:notes xmlns:a="http://schemas.openxmlformats.org/drawingml/2006/main" xmlns:p="http://schemas.openxmlformats.org/presentationml/2006/main">
+  <p:cSld>
+    <p:spTree>
+      <p:nvGrpSpPr>
+        <p:cNvPr id="1" name=""/>
+        <p:cNvGrpSpPr/>
+        <p:nvPr/>
+      </p:nvGrpSpPr>
+      <p:grpSpPr>
+        <a:xfrm>
+          <a:off x="0" y="0"/>
+          <a:ext cx="0" cy="0"/>
+          <a:chOff x="0" y="0"/>
+          <a:chExt cx="0" cy="0"/>
+        </a:xfrm>
+      </p:grpSpPr>
+      <p:sp>
+        <p:nvSpPr>
+          <p:cNvPr id="2" name="Slide Image Placeholder 1"/>
+          <p:cNvSpPr>
+            <a:spLocks noGrp="1"/>
+          </p:cNvSpPr>
+          <p:nvPr>
+            <p:ph type="sldImg" idx="2"/>
+          </p:nvPr>
+        </p:nvSpPr>
+        <p:spPr/>
+      </p:sp>
+      <p:sp>
+        <p:nvSpPr>
+          <p:cNvPr id="3" name="Notes Placeholder 2"/>
+          <p:cNvSpPr>
+            <a:spLocks noGrp="1"/>
+          </p:cNvSpPr>
+          <p:nvPr>
+            <p:ph type="body" idx="3" sz="quarter"/>
+          </p:nvPr>
+        </p:nvSpPr>
+        <p:spPr/>
+        <p:txBody>
+          <a:bodyPr/>
+          <a:lstStyle/>
+          <a:p>
+            <a:r>
+              <a:t>TEACHING PURPOSE</a:t>
+            </a:r>
+          </a:p>
+          <a:p>
+            <a:r>
+              <a:t>A chart title</a:t>
+            </a:r>
+          </a:p>
+          <a:p>
+            <a:r>
+              <a:t/>
+            </a:r>
+          </a:p>
+          <a:p>
+            <a:r>
+              <a:t>CONNECT</a:t>
+            </a:r>
+          </a:p>
+          <a:p>
+            <a:r>
+              <a:t>Build on the preceding slide: Histogram.</a:t>
+            </a:r>
+          </a:p>
+          <a:p>
+            <a:r>
+              <a:t/>
+            </a:r>
+          </a:p>
+          <a:p>
+            <a:r>
+              <a:t>LECTURER CUE</a:t>
+            </a:r>
+          </a:p>
+          <a:p>
+            <a:r>
+              <a:t>One line stating the FINDING. Not the variables, not the method: the thing you want the reader to leave with, in words, above the picture.</a:t>
+            </a:r>
+          </a:p>
+          <a:p>
+            <a:r>
+              <a:t/>
+            </a:r>
+          </a:p>
+          <a:p>
+            <a:r>
+              <a:t>EXPLAIN IN ORDINARY WORDS</a:t>
+            </a:r>
+          </a:p>
+          <a:p>
+            <a:r>
+              <a:t>Begin with the question and intended comparison. Identify what an axis, bar, point or colour represents, including its unit. A chart summarises data and may hide variation.</a:t>
+            </a:r>
+          </a:p>
+          <a:p>
+            <a:r>
+              <a:t/>
+            </a:r>
+          </a:p>
+          <a:p>
+            <a:r>
+              <a:t>CHECK AND EXPECTED ANSWER</a:t>
+            </a:r>
+          </a:p>
+          <a:p>
+            <a:r>
+              <a:t>For a bar chart comparing amounts, why normally start the value axis at zero? Bar length encodes magnitude; truncation can exaggerate differences.</a:t>
+            </a:r>
+          </a:p>
+          <a:p>
+            <a:r>
+              <a:t/>
+            </a:r>
+          </a:p>
+          <a:p>
+            <a:r>
+              <a:t>IF LEARNERS ARE STUCK</a:t>
+            </a:r>
+          </a:p>
+          <a:p>
+            <a:r>
+              <a:t>Read one mark aloud as a sentence. Check the population, period, filters and units before stating the finding.</a:t>
+            </a:r>
+          </a:p>
+          <a:p>
+            <a:r>
+              <a:t/>
+            </a:r>
+          </a:p>
+          <a:p>
+            <a:r>
+              <a:t>NEXT</a:t>
+            </a:r>
+          </a:p>
+          <a:p>
+            <a:r>
+              <a:t>What a chart hides. Move on after a learner can explain the current example or required action.</a:t>
+            </a:r>
+          </a:p>
+        </p:txBody>
+      </p:sp>
+      <p:sp>
+        <p:nvSpPr>
+          <p:cNvPr id="4" name="Slide Number Placeholder 3"/>
+          <p:cNvSpPr>
+            <a:spLocks noGrp="1"/>
+          </p:cNvSpPr>
+          <p:nvPr>
+            <p:ph type="sldNum" idx="5" sz="quarter"/>
+          </p:nvPr>
+        </p:nvSpPr>
+        <p:spPr/>
+      </p:sp>
+    </p:spTree>
+  </p:cSld>
+  <p:clrMapOvr>
+    <a:masterClrMapping/>
+  </p:clrMapOvr>
+</p:notes>
+</file>
+
+<file path=ppt/notesSlides/notesSlide9.xml><?xml version="1.0" encoding="utf-8"?>
+<p:notes xmlns:a="http://schemas.openxmlformats.org/drawingml/2006/main" xmlns:p="http://schemas.openxmlformats.org/presentationml/2006/main">
+  <p:cSld>
+    <p:spTree>
+      <p:nvGrpSpPr>
+        <p:cNvPr id="1" name=""/>
+        <p:cNvGrpSpPr/>
+        <p:nvPr/>
+      </p:nvGrpSpPr>
+      <p:grpSpPr>
+        <a:xfrm>
+          <a:off x="0" y="0"/>
+          <a:ext cx="0" cy="0"/>
+          <a:chOff x="0" y="0"/>
+          <a:chExt cx="0" cy="0"/>
+        </a:xfrm>
+      </p:grpSpPr>
+      <p:sp>
+        <p:nvSpPr>
+          <p:cNvPr id="2" name="Slide Image Placeholder 1"/>
+          <p:cNvSpPr>
+            <a:spLocks noGrp="1"/>
+          </p:cNvSpPr>
+          <p:nvPr>
+            <p:ph type="sldImg" idx="2"/>
+          </p:nvPr>
+        </p:nvSpPr>
+        <p:spPr/>
+      </p:sp>
+      <p:sp>
+        <p:nvSpPr>
+          <p:cNvPr id="3" name="Notes Placeholder 2"/>
+          <p:cNvSpPr>
+            <a:spLocks noGrp="1"/>
+          </p:cNvSpPr>
+          <p:nvPr>
+            <p:ph type="body" idx="3" sz="quarter"/>
+          </p:nvPr>
+        </p:nvSpPr>
+        <p:spPr/>
+        <p:txBody>
+          <a:bodyPr/>
+          <a:lstStyle/>
+          <a:p>
+            <a:r>
+              <a:t>TEACHING PURPOSE</a:t>
+            </a:r>
+          </a:p>
+          <a:p>
+            <a:r>
+              <a:t>What a chart hides</a:t>
+            </a:r>
+          </a:p>
+          <a:p>
+            <a:r>
+              <a:t/>
+            </a:r>
+          </a:p>
+          <a:p>
+            <a:r>
+              <a:t>CONNECT</a:t>
+            </a:r>
+          </a:p>
+          <a:p>
+            <a:r>
+              <a:t>Build on the preceding slide: A chart title.</a:t>
+            </a:r>
+          </a:p>
+          <a:p>
+            <a:r>
+              <a:t/>
+            </a:r>
+          </a:p>
+          <a:p>
+            <a:r>
+              <a:t>LECTURER CUE</a:t>
+            </a:r>
+          </a:p>
+          <a:p>
+            <a:r>
               <a:t>Every chart is a summary and every summary drops something. Naming what yours drops is the difference between a chart and a claim.</a:t>
+            </a:r>
+          </a:p>
+          <a:p>
+            <a:r>
+              <a:t/>
+            </a:r>
+          </a:p>
+          <a:p>
+            <a:r>
+              <a:t>EXPLAIN IN ORDINARY WORDS</a:t>
+            </a:r>
+          </a:p>
+          <a:p>
+            <a:r>
+              <a:t>Begin with the question and intended comparison. Identify what an axis, bar, point or colour represents, including its unit. A chart summarises data and may hide variation.</a:t>
+            </a:r>
+          </a:p>
+          <a:p>
+            <a:r>
+              <a:t/>
+            </a:r>
+          </a:p>
+          <a:p>
+            <a:r>
+              <a:t>CHECK AND EXPECTED ANSWER</a:t>
+            </a:r>
+          </a:p>
+          <a:p>
+            <a:r>
+              <a:t>For a bar chart comparing amounts, why normally start the value axis at zero? Bar length encodes magnitude; truncation can exaggerate differences.</a:t>
+            </a:r>
+          </a:p>
+          <a:p>
+            <a:r>
+              <a:t/>
+            </a:r>
+          </a:p>
+          <a:p>
+            <a:r>
+              <a:t>IF LEARNERS ARE STUCK</a:t>
+            </a:r>
+          </a:p>
+          <a:p>
+            <a:r>
+              <a:t>Read one mark aloud as a sentence. Check the population, period, filters and units before stating the finding.</a:t>
+            </a:r>
+          </a:p>
+          <a:p>
+            <a:r>
+              <a:t/>
+            </a:r>
+          </a:p>
+          <a:p>
+            <a:r>
+              <a:t>NEXT</a:t>
+            </a:r>
+          </a:p>
+          <a:p>
+            <a:r>
+              <a:t>Every part of a chart has a name. Move on after a learner can explain the current example or required action.</a:t>
             </a:r>
           </a:p>
         </p:txBody>
@@ -6722,7 +9086,7 @@
                 </a:solidFill>
                 <a:latin typeface="Calibri"/>
               </a:rPr>
-              <a:t>Honesty and its opposite, each shown beside its corrected version: the truncated axis, the dual axis, the pie chart with eleven slices, the bar chart sorted alphabetically. Then the title rule, which is the whole session</a:t>
+              <a:t>Honesty and its opposite, each shown beside its corrected version: the truncated axis, the dual axis, the pie chart with eleven slices, the bar chart sorted alphabetically.</a:t>
             </a:r>
           </a:p>
         </p:txBody>
@@ -7505,7 +9869,7 @@
         <p:spPr>
           <a:xfrm>
             <a:off x="685800" y="1600200"/>
-            <a:ext cx="10820095" cy="1100371"/>
+            <a:ext cx="10820095" cy="1603291"/>
           </a:xfrm>
           <a:prstGeom prst="rect">
             <a:avLst/>
@@ -7546,7 +9910,7 @@
         </p:nvSpPr>
         <p:spPr>
           <a:xfrm>
-            <a:off x="685800" y="2792011"/>
+            <a:off x="685800" y="3477811"/>
             <a:ext cx="10820095" cy="457200"/>
           </a:xfrm>
           <a:prstGeom prst="rect">
@@ -10652,7 +13016,7 @@
         <p:spPr>
           <a:xfrm>
             <a:off x="685800" y="1911095"/>
-            <a:ext cx="10820095" cy="969264"/>
+            <a:ext cx="10820095" cy="1236629"/>
           </a:xfrm>
           <a:prstGeom prst="roundRect">
             <a:avLst>
@@ -10697,7 +13061,7 @@
         <p:spPr>
           <a:xfrm>
             <a:off x="978408" y="2112264"/>
-            <a:ext cx="10234879" cy="603504"/>
+            <a:ext cx="10234879" cy="870869"/>
           </a:xfrm>
           <a:prstGeom prst="rect">
             <a:avLst/>
@@ -10738,7 +13102,7 @@
         </p:nvSpPr>
         <p:spPr>
           <a:xfrm>
-            <a:off x="685800" y="3191256"/>
+            <a:off x="685800" y="3422045"/>
             <a:ext cx="10820095" cy="310896"/>
           </a:xfrm>
           <a:prstGeom prst="rect">
@@ -10764,7 +13128,7 @@
                 </a:solidFill>
                 <a:latin typeface="Calibri"/>
               </a:rPr>
-              <a:t>Work these questions in order:</a:t>
+              <a:t>Work these questions in order</a:t>
             </a:r>
           </a:p>
         </p:txBody>
@@ -10777,8 +13141,8 @@
         </p:nvSpPr>
         <p:spPr>
           <a:xfrm>
-            <a:off x="685800" y="3611879"/>
-            <a:ext cx="5227167" cy="365760"/>
+            <a:off x="685800" y="3897533"/>
+            <a:ext cx="5227167" cy="385501"/>
           </a:xfrm>
           <a:prstGeom prst="rect">
             <a:avLst/>
@@ -10806,7 +13170,7 @@
                 </a:solidFill>
                 <a:latin typeface="Calibri"/>
               </a:rPr>
-              <a:t>→  Which of the four chart types does each question imply?</a:t>
+              <a:t>Which of the four chart types does each question imply?</a:t>
             </a:r>
           </a:p>
         </p:txBody>
@@ -10819,8 +13183,8 @@
         </p:nvSpPr>
         <p:spPr>
           <a:xfrm>
-            <a:off x="685800" y="4032504"/>
-            <a:ext cx="5227167" cy="365760"/>
+            <a:off x="685800" y="4374475"/>
+            <a:ext cx="5227167" cy="385501"/>
           </a:xfrm>
           <a:prstGeom prst="rect">
             <a:avLst/>
@@ -10848,7 +13212,7 @@
                 </a:solidFill>
                 <a:latin typeface="Calibri"/>
               </a:rPr>
-              <a:t>→  Title: the finding, in words, not the variables.</a:t>
+              <a:t>Title: the finding, in words, not the variables.</a:t>
             </a:r>
           </a:p>
         </p:txBody>
@@ -10861,8 +13225,8 @@
         </p:nvSpPr>
         <p:spPr>
           <a:xfrm>
-            <a:off x="685800" y="4453128"/>
-            <a:ext cx="5227167" cy="365760"/>
+            <a:off x="685800" y="4851416"/>
+            <a:ext cx="5227167" cy="697851"/>
           </a:xfrm>
           <a:prstGeom prst="rect">
             <a:avLst/>
@@ -10890,7 +13254,7 @@
                 </a:solidFill>
                 <a:latin typeface="Calibri"/>
               </a:rPr>
-              <a:t>→  Axis labels with units. Y axis from zero unless you can justify otherwise.</a:t>
+              <a:t>Axis labels with units. Y axis from zero unless you can justify otherwise.</a:t>
             </a:r>
           </a:p>
         </p:txBody>
@@ -10903,8 +13267,8 @@
         </p:nvSpPr>
         <p:spPr>
           <a:xfrm>
-            <a:off x="6278727" y="3611879"/>
-            <a:ext cx="5227167" cy="365760"/>
+            <a:off x="6278727" y="3897533"/>
+            <a:ext cx="5227167" cy="385501"/>
           </a:xfrm>
           <a:prstGeom prst="rect">
             <a:avLst/>
@@ -10932,7 +13296,7 @@
                 </a:solidFill>
                 <a:latin typeface="Calibri"/>
               </a:rPr>
-              <a:t>→  One annotation pointing at the thing you want seen.</a:t>
+              <a:t>One annotation pointing at the thing you want seen.</a:t>
             </a:r>
           </a:p>
         </p:txBody>
@@ -10945,8 +13309,8 @@
         </p:nvSpPr>
         <p:spPr>
           <a:xfrm>
-            <a:off x="6278727" y="4032504"/>
-            <a:ext cx="5227167" cy="365760"/>
+            <a:off x="6278727" y="4374475"/>
+            <a:ext cx="5227167" cy="385501"/>
           </a:xfrm>
           <a:prstGeom prst="rect">
             <a:avLst/>
@@ -10974,7 +13338,7 @@
                 </a:solidFill>
                 <a:latin typeface="Calibri"/>
               </a:rPr>
-              <a:t>→  One sentence under each: what does this chart NOT show?</a:t>
+              <a:t>One sentence under each: what does this chart NOT show?</a:t>
             </a:r>
           </a:p>
         </p:txBody>
@@ -13749,7 +16113,7 @@
                 </a:solidFill>
                 <a:latin typeface="Calibri"/>
               </a:rPr>
-              <a:t>The anatomy figure first: every part of a chart named, because you cannot be told to label an axis if nobody has said which part is the axis. Then the four charts and the question each answers: line for change over time,</a:t>
+              <a:t>The anatomy figure first: every part of a chart named, because you cannot be told to label an axis if nobody has said which part is the axis.</a:t>
             </a:r>
           </a:p>
         </p:txBody>
